--- a/AIFinanceCrashcourse/slides/Module-01-Foundations-of-Agentic-AI.pptx
+++ b/AIFinanceCrashcourse/slides/Module-01-Foundations-of-Agentic-AI.pptx
@@ -2915,7 +2915,7 @@
           <a:p>
             <a:pPr/>
             <a:r>
-              <a:t>ISBMS · PGDM 2025–27 · SEMESTER III · SESSION 1 OF 10</a:t>
+              <a:t>AI IN FINANCE · THE COMPLETE CRASH COURSE · MODULE 1 OF 10</a:t>
             </a:r>
           </a:p>
         </p:txBody>
@@ -3084,7 +3084,7 @@
               </a:defRPr>
             </a:pPr>
             <a:r>
-              <a:t>Faculty · Agentic AI &amp; Advanced Analytics in Finance (PGDM-SEM3-SPEC-AIFINANCE)</a:t>
+              <a:t>AI in Finance: The Complete Crash Course</a:t>
             </a:r>
           </a:p>
           <a:p>
@@ -3102,7 +3102,7 @@
               </a:defRPr>
             </a:pPr>
             <a:r>
-              <a:t>tejasgjadhav.github.io/AIFINANCE</a:t>
+              <a:t>tejasgjadhav.github.io/AIFinanceCrashcourse</a:t>
             </a:r>
           </a:p>
         </p:txBody>
@@ -3451,7 +3451,7 @@
           <a:p>
             <a:pPr/>
             <a:r>
-              <a:t>ISBMS · PGDM 2025–27 · AGENTIC AI &amp; ADVANCED ANALYTICS IN FINANCE</a:t>
+              <a:t>AI IN FINANCE · THE COMPLETE CRASH COURSE</a:t>
             </a:r>
           </a:p>
         </p:txBody>
@@ -4365,7 +4365,7 @@
           <a:p>
             <a:pPr/>
             <a:r>
-              <a:t>ISBMS · PGDM 2025–27 · AGENTIC AI &amp; ADVANCED ANALYTICS IN FINANCE</a:t>
+              <a:t>AI IN FINANCE · THE COMPLETE CRASH COURSE</a:t>
             </a:r>
           </a:p>
         </p:txBody>
@@ -5363,7 +5363,7 @@
           <a:p>
             <a:pPr/>
             <a:r>
-              <a:t>ISBMS · PGDM 2025–27 · AGENTIC AI &amp; ADVANCED ANALYTICS IN FINANCE</a:t>
+              <a:t>AI IN FINANCE · THE COMPLETE CRASH COURSE</a:t>
             </a:r>
           </a:p>
         </p:txBody>
@@ -6697,7 +6697,7 @@
           <a:p>
             <a:pPr/>
             <a:r>
-              <a:t>ISBMS · PGDM 2025–27 · AGENTIC AI &amp; ADVANCED ANALYTICS IN FINANCE</a:t>
+              <a:t>AI IN FINANCE · THE COMPLETE CRASH COURSE</a:t>
             </a:r>
           </a:p>
         </p:txBody>
@@ -8501,7 +8501,7 @@
           <a:p>
             <a:pPr/>
             <a:r>
-              <a:t>ISBMS · PGDM 2025–27 · AGENTIC AI &amp; ADVANCED ANALYTICS IN FINANCE</a:t>
+              <a:t>AI IN FINANCE · THE COMPLETE CRASH COURSE</a:t>
             </a:r>
           </a:p>
         </p:txBody>
@@ -8866,7 +8866,7 @@
               </a:defRPr>
             </a:pPr>
             <a:r>
-              <a:t>You ask   </a:t>
+              <a:t>You ask</a:t>
             </a:r>
             <a:r>
               <a:rPr b="0" sz="1100">
@@ -9110,7 +9110,7 @@
               </a:defRPr>
             </a:pPr>
             <a:r>
-              <a:t>Model chooses a tool   </a:t>
+              <a:t>Model chooses a tool</a:t>
             </a:r>
             <a:r>
               <a:rPr b="0" sz="1100">
@@ -9354,7 +9354,7 @@
               </a:defRPr>
             </a:pPr>
             <a:r>
-              <a:t>Your system runs it   </a:t>
+              <a:t>Your system runs it</a:t>
             </a:r>
             <a:r>
               <a:rPr b="0" sz="1100">
@@ -9598,7 +9598,7 @@
               </a:defRPr>
             </a:pPr>
             <a:r>
-              <a:t>Model answers with real data   </a:t>
+              <a:t>Model answers with real data</a:t>
             </a:r>
             <a:r>
               <a:rPr b="0" sz="1100">
@@ -9685,7 +9685,7 @@
               </a:defRPr>
             </a:pPr>
             <a:r>
-              <a:t>The model never touches the market. </a:t>
+              <a:t>The model never touches the market.</a:t>
             </a:r>
             <a:r>
               <a:rPr b="0">
@@ -9737,7 +9737,7 @@
           <a:p>
             <a:pPr/>
             <a:r>
-              <a:t>ISBMS · PGDM 2025–27 · AGENTIC AI &amp; ADVANCED ANALYTICS IN FINANCE</a:t>
+              <a:t>AI IN FINANCE · THE COMPLETE CRASH COURSE</a:t>
             </a:r>
           </a:p>
         </p:txBody>
@@ -10100,7 +10100,7 @@
               </a:defRPr>
             </a:pPr>
             <a:r>
-              <a:t>  "name": "get_close_price",</a:t>
+              <a:t>"name": "get_close_price",</a:t>
             </a:r>
           </a:p>
           <a:p>
@@ -10122,7 +10122,7 @@
               </a:defRPr>
             </a:pPr>
             <a:r>
-              <a:t>  "description": "Latest NSE closing</a:t>
+              <a:t>"description": "Latest NSE closing</a:t>
             </a:r>
           </a:p>
           <a:p>
@@ -10144,7 +10144,7 @@
               </a:defRPr>
             </a:pPr>
             <a:r>
-              <a:t>                  price for one symbol.",</a:t>
+              <a:t>price for one symbol.",</a:t>
             </a:r>
           </a:p>
           <a:p>
@@ -10166,7 +10166,7 @@
               </a:defRPr>
             </a:pPr>
             <a:r>
-              <a:t>  "input_schema": {</a:t>
+              <a:t>"input_schema": {</a:t>
             </a:r>
           </a:p>
           <a:p>
@@ -10188,7 +10188,7 @@
               </a:defRPr>
             </a:pPr>
             <a:r>
-              <a:t>    "type": "object",</a:t>
+              <a:t>"type": "object",</a:t>
             </a:r>
           </a:p>
           <a:p>
@@ -10210,7 +10210,7 @@
               </a:defRPr>
             </a:pPr>
             <a:r>
-              <a:t>    "properties": {</a:t>
+              <a:t>"properties": {</a:t>
             </a:r>
           </a:p>
           <a:p>
@@ -10232,7 +10232,7 @@
               </a:defRPr>
             </a:pPr>
             <a:r>
-              <a:t>      "symbol": {"type": "string"},</a:t>
+              <a:t>"symbol": {"type": "string"},</a:t>
             </a:r>
           </a:p>
           <a:p>
@@ -10254,7 +10254,7 @@
               </a:defRPr>
             </a:pPr>
             <a:r>
-              <a:t>      "date":   {"type": "string"}},</a:t>
+              <a:t>"date":   {"type": "string"}},</a:t>
             </a:r>
           </a:p>
           <a:p>
@@ -10276,7 +10276,7 @@
               </a:defRPr>
             </a:pPr>
             <a:r>
-              <a:t>    "required": ["symbol"]}</a:t>
+              <a:t>"required": ["symbol"]}</a:t>
             </a:r>
           </a:p>
           <a:p>
@@ -10838,7 +10838,7 @@
           <a:p>
             <a:pPr/>
             <a:r>
-              <a:t>ISBMS · PGDM 2025–27 · AGENTIC AI &amp; ADVANCED ANALYTICS IN FINANCE</a:t>
+              <a:t>AI IN FINANCE · THE COMPLETE CRASH COURSE</a:t>
             </a:r>
           </a:p>
         </p:txBody>
@@ -12086,7 +12086,7 @@
               </a:defRPr>
             </a:pPr>
             <a:r>
-              <a:t>The lesson for your own work:  </a:t>
+              <a:t>The lesson for your own work:</a:t>
             </a:r>
             <a:r>
               <a:rPr b="0">
@@ -12188,7 +12188,7 @@
           <a:p>
             <a:pPr/>
             <a:r>
-              <a:t>ISBMS · PGDM 2025–27 · AGENTIC AI &amp; ADVANCED ANALYTICS IN FINANCE</a:t>
+              <a:t>AI IN FINANCE · THE COMPLETE CRASH COURSE</a:t>
             </a:r>
           </a:p>
         </p:txBody>
@@ -14328,7 +14328,7 @@
                 </a:solidFill>
                 <a:latin typeface="Calibri"/>
               </a:rPr>
-              <a:t>ISBMS · PGDM 2025–27 · AGENTIC AI &amp; ADVANCED ANALYTICS IN FINANCE</a:t>
+              <a:t>AI IN FINANCE · THE COMPLETE CRASH COURSE</a:t>
             </a:r>
           </a:p>
         </p:txBody>
@@ -15066,7 +15066,7 @@
               </a:defRPr>
             </a:pPr>
             <a:r>
-              <a:t>▪  </a:t>
+              <a:t>▪</a:t>
             </a:r>
             <a:r>
               <a:rPr b="0">
@@ -15119,7 +15119,7 @@
               </a:defRPr>
             </a:pPr>
             <a:r>
-              <a:t>▪  </a:t>
+              <a:t>▪</a:t>
             </a:r>
             <a:r>
               <a:rPr b="0">
@@ -15172,7 +15172,7 @@
               </a:defRPr>
             </a:pPr>
             <a:r>
-              <a:t>▪  </a:t>
+              <a:t>▪</a:t>
             </a:r>
             <a:r>
               <a:rPr b="0">
@@ -15225,7 +15225,7 @@
               </a:defRPr>
             </a:pPr>
             <a:r>
-              <a:t>▪  </a:t>
+              <a:t>▪</a:t>
             </a:r>
             <a:r>
               <a:rPr b="0">
@@ -15278,7 +15278,7 @@
               </a:defRPr>
             </a:pPr>
             <a:r>
-              <a:t>Discuss:  </a:t>
+              <a:t>Discuss:</a:t>
             </a:r>
             <a:r>
               <a:rPr b="0">
@@ -15286,7 +15286,7 @@
                   <a:srgbClr val="5D6B7E"/>
                 </a:solidFill>
               </a:rPr>
-              <a:t>which workflow at an Indian bank or GCC would you aim this at first, and what would you have to prove before compliance switched it on?    </a:t>
+              <a:t>which workflow at an Indian bank or GCC would you aim this at first, and what would you have to prove before compliance switched it on?</a:t>
             </a:r>
             <a:r>
               <a:rPr b="0" sz="900">
@@ -15341,7 +15341,7 @@
           <a:p>
             <a:pPr/>
             <a:r>
-              <a:t>ISBMS · PGDM 2025–27 · AGENTIC AI &amp; ADVANCED ANALYTICS IN FINANCE</a:t>
+              <a:t>AI IN FINANCE · THE COMPLETE CRASH COURSE</a:t>
             </a:r>
           </a:p>
         </p:txBody>
@@ -16867,7 +16867,7 @@
           <a:p>
             <a:pPr/>
             <a:r>
-              <a:t>ISBMS · PGDM 2025–27 · AGENTIC AI &amp; ADVANCED ANALYTICS IN FINANCE</a:t>
+              <a:t>AI IN FINANCE · THE COMPLETE CRASH COURSE</a:t>
             </a:r>
           </a:p>
         </p:txBody>
@@ -17262,7 +17262,7 @@
               </a:defRPr>
             </a:pPr>
             <a:r>
-              <a:t>▪  </a:t>
+              <a:t>▪</a:t>
             </a:r>
             <a:r>
               <a:rPr b="0">
@@ -17315,7 +17315,7 @@
               </a:defRPr>
             </a:pPr>
             <a:r>
-              <a:t>▪  </a:t>
+              <a:t>▪</a:t>
             </a:r>
             <a:r>
               <a:rPr b="0">
@@ -17368,7 +17368,7 @@
               </a:defRPr>
             </a:pPr>
             <a:r>
-              <a:t>▪  </a:t>
+              <a:t>▪</a:t>
             </a:r>
             <a:r>
               <a:rPr b="0">
@@ -17421,7 +17421,7 @@
               </a:defRPr>
             </a:pPr>
             <a:r>
-              <a:t>▪  </a:t>
+              <a:t>▪</a:t>
             </a:r>
             <a:r>
               <a:rPr b="0">
@@ -17474,7 +17474,7 @@
               </a:defRPr>
             </a:pPr>
             <a:r>
-              <a:t>▪  </a:t>
+              <a:t>▪</a:t>
             </a:r>
             <a:r>
               <a:rPr b="0">
@@ -17664,7 +17664,7 @@
               </a:defRPr>
             </a:pPr>
             <a:r>
-              <a:t>▪  </a:t>
+              <a:t>▪</a:t>
             </a:r>
             <a:r>
               <a:rPr b="0">
@@ -17717,7 +17717,7 @@
               </a:defRPr>
             </a:pPr>
             <a:r>
-              <a:t>▪  </a:t>
+              <a:t>▪</a:t>
             </a:r>
             <a:r>
               <a:rPr b="0">
@@ -17770,7 +17770,7 @@
               </a:defRPr>
             </a:pPr>
             <a:r>
-              <a:t>▪  </a:t>
+              <a:t>▪</a:t>
             </a:r>
             <a:r>
               <a:rPr b="0">
@@ -17823,7 +17823,7 @@
               </a:defRPr>
             </a:pPr>
             <a:r>
-              <a:t>▪  </a:t>
+              <a:t>▪</a:t>
             </a:r>
             <a:r>
               <a:rPr b="0">
@@ -17876,7 +17876,7 @@
               </a:defRPr>
             </a:pPr>
             <a:r>
-              <a:t>▪  </a:t>
+              <a:t>▪</a:t>
             </a:r>
             <a:r>
               <a:rPr b="0">
@@ -18066,7 +18066,7 @@
               </a:defRPr>
             </a:pPr>
             <a:r>
-              <a:t>▪  </a:t>
+              <a:t>▪</a:t>
             </a:r>
             <a:r>
               <a:rPr b="0">
@@ -18119,7 +18119,7 @@
               </a:defRPr>
             </a:pPr>
             <a:r>
-              <a:t>▪  </a:t>
+              <a:t>▪</a:t>
             </a:r>
             <a:r>
               <a:rPr b="0">
@@ -18172,7 +18172,7 @@
               </a:defRPr>
             </a:pPr>
             <a:r>
-              <a:t>▪  </a:t>
+              <a:t>▪</a:t>
             </a:r>
             <a:r>
               <a:rPr b="0">
@@ -18225,7 +18225,7 @@
               </a:defRPr>
             </a:pPr>
             <a:r>
-              <a:t>▪  </a:t>
+              <a:t>▪</a:t>
             </a:r>
             <a:r>
               <a:rPr b="0">
@@ -18278,7 +18278,7 @@
               </a:defRPr>
             </a:pPr>
             <a:r>
-              <a:t>▪  </a:t>
+              <a:t>▪</a:t>
             </a:r>
             <a:r>
               <a:rPr b="0">
@@ -18366,7 +18366,7 @@
               </a:defRPr>
             </a:pPr>
             <a:r>
-              <a:t>Our goal for today:  </a:t>
+              <a:t>Our goal for today:</a:t>
             </a:r>
             <a:r>
               <a:rPr b="0">
@@ -18421,7 +18421,7 @@
           <a:p>
             <a:pPr/>
             <a:r>
-              <a:t>ISBMS · PGDM 2025–27 · AGENTIC AI &amp; ADVANCED ANALYTICS IN FINANCE</a:t>
+              <a:t>AI IN FINANCE · THE COMPLETE CRASH COURSE</a:t>
             </a:r>
           </a:p>
         </p:txBody>
@@ -18863,7 +18863,7 @@
               </a:defRPr>
             </a:pPr>
             <a:r>
-              <a:t> </a:t>
+              <a:t/>
             </a:r>
           </a:p>
           <a:p>
@@ -18907,7 +18907,7 @@
               </a:defRPr>
             </a:pPr>
             <a:r>
-              <a:t> </a:t>
+              <a:t/>
             </a:r>
           </a:p>
           <a:p>
@@ -18973,7 +18973,7 @@
               </a:defRPr>
             </a:pPr>
             <a:r>
-              <a:t> </a:t>
+              <a:t/>
             </a:r>
           </a:p>
           <a:p>
@@ -19039,7 +19039,7 @@
               </a:defRPr>
             </a:pPr>
             <a:r>
-              <a:t> </a:t>
+              <a:t/>
             </a:r>
           </a:p>
           <a:p>
@@ -19623,7 +19623,7 @@
           <a:p>
             <a:pPr/>
             <a:r>
-              <a:t>ISBMS · PGDM 2025–27 · AGENTIC AI &amp; ADVANCED ANALYTICS IN FINANCE</a:t>
+              <a:t>AI IN FINANCE · THE COMPLETE CRASH COURSE</a:t>
             </a:r>
           </a:p>
         </p:txBody>
@@ -21234,7 +21234,7 @@
           <a:p>
             <a:pPr/>
             <a:r>
-              <a:t>ISBMS · PGDM 2025–27 · AGENTIC AI &amp; ADVANCED ANALYTICS IN FINANCE</a:t>
+              <a:t>AI IN FINANCE · THE COMPLETE CRASH COURSE</a:t>
             </a:r>
           </a:p>
         </p:txBody>
@@ -22944,7 +22944,7 @@
           <a:p>
             <a:pPr/>
             <a:r>
-              <a:t>ISBMS · PGDM 2025–27 · AGENTIC AI &amp; ADVANCED ANALYTICS IN FINANCE</a:t>
+              <a:t>AI IN FINANCE · THE COMPLETE CRASH COURSE</a:t>
             </a:r>
           </a:p>
         </p:txBody>
@@ -23343,7 +23343,7 @@
                 </a:solidFill>
                 <a:latin typeface="Calibri"/>
               </a:rPr>
-              <a:t>TIP  </a:t>
+              <a:t>TIP</a:t>
             </a:r>
             <a:r>
               <a:rPr sz="900" b="0">
@@ -23543,7 +23543,7 @@
                 </a:solidFill>
                 <a:latin typeface="Calibri"/>
               </a:rPr>
-              <a:t>TIP  </a:t>
+              <a:t>TIP</a:t>
             </a:r>
             <a:r>
               <a:rPr sz="900" b="0">
@@ -23743,7 +23743,7 @@
                 </a:solidFill>
                 <a:latin typeface="Calibri"/>
               </a:rPr>
-              <a:t>TIP  </a:t>
+              <a:t>TIP</a:t>
             </a:r>
             <a:r>
               <a:rPr sz="900" b="0">
@@ -23943,7 +23943,7 @@
                 </a:solidFill>
                 <a:latin typeface="Calibri"/>
               </a:rPr>
-              <a:t>TIP  </a:t>
+              <a:t>TIP</a:t>
             </a:r>
             <a:r>
               <a:rPr sz="900" b="0">
@@ -24143,7 +24143,7 @@
                 </a:solidFill>
                 <a:latin typeface="Calibri"/>
               </a:rPr>
-              <a:t>TIP  </a:t>
+              <a:t>TIP</a:t>
             </a:r>
             <a:r>
               <a:rPr sz="900" b="0">
@@ -24343,7 +24343,7 @@
                 </a:solidFill>
                 <a:latin typeface="Calibri"/>
               </a:rPr>
-              <a:t>TIP  </a:t>
+              <a:t>TIP</a:t>
             </a:r>
             <a:r>
               <a:rPr sz="900" b="0">
@@ -24739,7 +24739,7 @@
                 </a:solidFill>
                 <a:latin typeface="Calibri"/>
               </a:rPr>
-              <a:t>TIP  </a:t>
+              <a:t>TIP</a:t>
             </a:r>
             <a:r>
               <a:rPr sz="900" b="0">
@@ -24939,7 +24939,7 @@
                 </a:solidFill>
                 <a:latin typeface="Calibri"/>
               </a:rPr>
-              <a:t>TIP  </a:t>
+              <a:t>TIP</a:t>
             </a:r>
             <a:r>
               <a:rPr sz="900" b="0">
@@ -25383,7 +25383,7 @@
                 </a:solidFill>
                 <a:latin typeface="Calibri"/>
               </a:rPr>
-              <a:t>TIP  </a:t>
+              <a:t>TIP</a:t>
             </a:r>
             <a:r>
               <a:rPr sz="1050" b="0">
@@ -25583,7 +25583,7 @@
                 </a:solidFill>
                 <a:latin typeface="Calibri"/>
               </a:rPr>
-              <a:t>TIP  </a:t>
+              <a:t>TIP</a:t>
             </a:r>
             <a:r>
               <a:rPr sz="1050" b="0">
@@ -25678,7 +25678,7 @@
                 </a:solidFill>
                 <a:latin typeface="Calibri"/>
               </a:rPr>
-              <a:t>Before Session 2:  </a:t>
+              <a:t>Before Session 2:</a:t>
             </a:r>
             <a:r>
               <a:rPr sz="1050" b="0">
@@ -25729,7 +25729,7 @@
                 </a:solidFill>
                 <a:latin typeface="Calibri"/>
               </a:rPr>
-              <a:t>ISBMS · PGDM 2025–27 · AGENTIC AI &amp; ADVANCED ANALYTICS IN FINANCE</a:t>
+              <a:t>AI IN FINANCE · THE COMPLETE CRASH COURSE</a:t>
             </a:r>
           </a:p>
         </p:txBody>
@@ -27025,7 +27025,7 @@
           <a:p>
             <a:pPr/>
             <a:r>
-              <a:t>ISBMS · PGDM 2025–27 · AGENTIC AI &amp; ADVANCED ANALYTICS IN FINANCE</a:t>
+              <a:t>AI IN FINANCE · THE COMPLETE CRASH COURSE</a:t>
             </a:r>
           </a:p>
         </p:txBody>
@@ -28290,7 +28290,7 @@
               </a:defRPr>
             </a:pPr>
             <a:r>
-              <a:t>The dividing line:  </a:t>
+              <a:t>The dividing line:</a:t>
             </a:r>
             <a:r>
               <a:rPr b="0">
@@ -28345,7 +28345,7 @@
           <a:p>
             <a:pPr/>
             <a:r>
-              <a:t>ISBMS · PGDM 2025–27 · AGENTIC AI &amp; ADVANCED ANALYTICS IN FINANCE</a:t>
+              <a:t>AI IN FINANCE · THE COMPLETE CRASH COURSE</a:t>
             </a:r>
           </a:p>
         </p:txBody>
@@ -29867,7 +29867,7 @@
           <a:p>
             <a:pPr/>
             <a:r>
-              <a:t>ISBMS · PGDM 2025–27 · AGENTIC AI &amp; ADVANCED ANALYTICS IN FINANCE</a:t>
+              <a:t>AI IN FINANCE · THE COMPLETE CRASH COURSE</a:t>
             </a:r>
           </a:p>
         </p:txBody>
@@ -30885,7 +30885,7 @@
               <a:t>Read trillions of words — books, filings, the web. Learn language, facts, reasoning patterns.</a:t>
             </a:r>
             <a:r>
-              <a:t> NLP- Natural language processing- LLM uses</a:t>
+              <a:t>NLP- Natural language processing- LLM uses</a:t>
             </a:r>
           </a:p>
         </p:txBody>
@@ -31308,7 +31308,7 @@
               <a:t>Humans rank answers; the model learns to be helpful, honest, harmless.</a:t>
             </a:r>
             <a:r>
-              <a:t> Reinforced learning from Human feedback</a:t>
+              <a:t>Reinforced learning from Human feedback</a:t>
             </a:r>
           </a:p>
         </p:txBody>
@@ -31387,7 +31387,7 @@
               </a:defRPr>
             </a:pPr>
             <a:r>
-              <a:t>It has no database of truth — </a:t>
+              <a:t>It has no database of truth —</a:t>
             </a:r>
             <a:r>
               <a:rPr b="1">
@@ -31439,7 +31439,7 @@
           <a:p>
             <a:pPr/>
             <a:r>
-              <a:t>ISBMS · PGDM 2025–27 · AGENTIC AI &amp; ADVANCED ANALYTICS IN FINANCE</a:t>
+              <a:t>AI IN FINANCE · THE COMPLETE CRASH COURSE</a:t>
             </a:r>
           </a:p>
         </p:txBody>
@@ -33309,7 +33309,7 @@
           <a:p>
             <a:pPr/>
             <a:r>
-              <a:t>ISBMS · PGDM 2025–27 · AGENTIC AI &amp; ADVANCED ANALYTICS IN FINANCE</a:t>
+              <a:t>AI IN FINANCE · THE COMPLETE CRASH COURSE</a:t>
             </a:r>
           </a:p>
         </p:txBody>
@@ -34558,7 +34558,7 @@
               </a:defRPr>
             </a:pPr>
             <a:r>
-              <a:t>Closed models </a:t>
+              <a:t>Closed models</a:t>
             </a:r>
             <a:r>
               <a:rPr b="0">
@@ -34566,10 +34566,10 @@
                   <a:srgbClr val="1B2A41"/>
                 </a:solidFill>
               </a:rPr>
-              <a:t>= rented via API, best quality.  </a:t>
-            </a:r>
-            <a:r>
-              <a:t>Open models </a:t>
+              <a:t>= rented via API, best quality.</a:t>
+            </a:r>
+            <a:r>
+              <a:t>Open models</a:t>
             </a:r>
             <a:r>
               <a:rPr b="0">
@@ -34621,7 +34621,7 @@
           <a:p>
             <a:pPr/>
             <a:r>
-              <a:t>ISBMS · PGDM 2025–27 · AGENTIC AI &amp; ADVANCED ANALYTICS IN FINANCE</a:t>
+              <a:t>AI IN FINANCE · THE COMPLETE CRASH COURSE</a:t>
             </a:r>
           </a:p>
         </p:txBody>
@@ -35737,7 +35737,7 @@
               </a:defRPr>
             </a:pPr>
             <a:r>
-              <a:t>Be fair about this: </a:t>
+              <a:t>Be fair about this:</a:t>
             </a:r>
             <a:r>
               <a:rPr b="0">
@@ -35792,7 +35792,7 @@
           <a:p>
             <a:pPr/>
             <a:r>
-              <a:t>ISBMS · PGDM 2025–27 · AGENTIC AI &amp; ADVANCED ANALYTICS IN FINANCE</a:t>
+              <a:t>AI IN FINANCE · THE COMPLETE CRASH COURSE</a:t>
             </a:r>
           </a:p>
         </p:txBody>
